--- a/submission/PITCH_DECK.pptx
+++ b/submission/PITCH_DECK.pptx
@@ -3935,39 +3935,15 @@
           </a:p>
         </p:txBody>
       </p:sp>
-      <p:pic>
-        <p:nvPicPr>
-          <p:cNvPr id="3" name="Picture 2" descr="icon.png"/>
-          <p:cNvPicPr>
-            <a:picLocks noChangeAspect="1"/>
-          </p:cNvPicPr>
-          <p:nvPr/>
-        </p:nvPicPr>
-        <p:blipFill>
-          <a:blip r:embed="rId2"/>
-          <a:stretch>
-            <a:fillRect/>
-          </a:stretch>
-        </p:blipFill>
-        <p:spPr>
-          <a:xfrm>
-            <a:off x="548640" y="292608"/>
-            <a:ext cx="384048" cy="384048"/>
-          </a:xfrm>
-          <a:prstGeom prst="rect">
-            <a:avLst/>
-          </a:prstGeom>
-        </p:spPr>
-      </p:pic>
-      <p:sp>
-        <p:nvSpPr>
-          <p:cNvPr id="4" name="TextBox 3"/>
+      <p:sp>
+        <p:nvSpPr>
+          <p:cNvPr id="3" name="TextBox 2"/>
           <p:cNvSpPr txBox="1"/>
           <p:nvPr/>
         </p:nvSpPr>
         <p:spPr>
           <a:xfrm>
-            <a:off x="1024128" y="347472"/>
+            <a:off x="548640" y="347472"/>
             <a:ext cx="5486400" cy="320040"/>
           </a:xfrm>
           <a:prstGeom prst="rect">
@@ -3997,7 +3973,7 @@
       </p:sp>
       <p:sp>
         <p:nvSpPr>
-          <p:cNvPr id="5" name="Rounded Rectangle 4"/>
+          <p:cNvPr id="4" name="Rounded Rectangle 3"/>
           <p:cNvSpPr/>
           <p:nvPr/>
         </p:nvSpPr>
@@ -4052,7 +4028,7 @@
       </p:sp>
       <p:sp>
         <p:nvSpPr>
-          <p:cNvPr id="6" name="TextBox 5"/>
+          <p:cNvPr id="5" name="TextBox 4"/>
           <p:cNvSpPr txBox="1"/>
           <p:nvPr/>
         </p:nvSpPr>
@@ -4088,7 +4064,7 @@
       </p:sp>
       <p:sp>
         <p:nvSpPr>
-          <p:cNvPr id="7" name="TextBox 6"/>
+          <p:cNvPr id="6" name="TextBox 5"/>
           <p:cNvSpPr txBox="1"/>
           <p:nvPr/>
         </p:nvSpPr>
@@ -4124,7 +4100,7 @@
       </p:sp>
       <p:sp>
         <p:nvSpPr>
-          <p:cNvPr id="8" name="Rectangle 7"/>
+          <p:cNvPr id="7" name="Rectangle 6"/>
           <p:cNvSpPr/>
           <p:nvPr/>
         </p:nvSpPr>
@@ -4167,7 +4143,7 @@
       </p:sp>
       <p:sp>
         <p:nvSpPr>
-          <p:cNvPr id="9" name="Rounded Rectangle 8"/>
+          <p:cNvPr id="8" name="Rounded Rectangle 7"/>
           <p:cNvSpPr/>
           <p:nvPr/>
         </p:nvSpPr>
@@ -4321,7 +4297,7 @@
       </p:sp>
       <p:sp>
         <p:nvSpPr>
-          <p:cNvPr id="10" name="Rounded Rectangle 9"/>
+          <p:cNvPr id="9" name="Rounded Rectangle 8"/>
           <p:cNvSpPr/>
           <p:nvPr/>
         </p:nvSpPr>
@@ -4507,7 +4483,7 @@
       </p:sp>
       <p:sp>
         <p:nvSpPr>
-          <p:cNvPr id="11" name="TextBox 10"/>
+          <p:cNvPr id="10" name="TextBox 9"/>
           <p:cNvSpPr txBox="1"/>
           <p:nvPr/>
         </p:nvSpPr>
@@ -4602,39 +4578,15 @@
           </a:p>
         </p:txBody>
       </p:sp>
-      <p:pic>
-        <p:nvPicPr>
-          <p:cNvPr id="3" name="Picture 2" descr="icon.png"/>
-          <p:cNvPicPr>
-            <a:picLocks noChangeAspect="1"/>
-          </p:cNvPicPr>
-          <p:nvPr/>
-        </p:nvPicPr>
-        <p:blipFill>
-          <a:blip r:embed="rId2"/>
-          <a:stretch>
-            <a:fillRect/>
-          </a:stretch>
-        </p:blipFill>
-        <p:spPr>
-          <a:xfrm>
-            <a:off x="548640" y="292608"/>
-            <a:ext cx="384048" cy="384048"/>
-          </a:xfrm>
-          <a:prstGeom prst="rect">
-            <a:avLst/>
-          </a:prstGeom>
-        </p:spPr>
-      </p:pic>
-      <p:sp>
-        <p:nvSpPr>
-          <p:cNvPr id="4" name="TextBox 3"/>
+      <p:sp>
+        <p:nvSpPr>
+          <p:cNvPr id="3" name="TextBox 2"/>
           <p:cNvSpPr txBox="1"/>
           <p:nvPr/>
         </p:nvSpPr>
         <p:spPr>
           <a:xfrm>
-            <a:off x="1024128" y="347472"/>
+            <a:off x="548640" y="347472"/>
             <a:ext cx="5486400" cy="320040"/>
           </a:xfrm>
           <a:prstGeom prst="rect">
@@ -4664,7 +4616,7 @@
       </p:sp>
       <p:sp>
         <p:nvSpPr>
-          <p:cNvPr id="5" name="Rounded Rectangle 4"/>
+          <p:cNvPr id="4" name="Rounded Rectangle 3"/>
           <p:cNvSpPr/>
           <p:nvPr/>
         </p:nvSpPr>
@@ -4719,7 +4671,7 @@
       </p:sp>
       <p:sp>
         <p:nvSpPr>
-          <p:cNvPr id="6" name="TextBox 5"/>
+          <p:cNvPr id="5" name="TextBox 4"/>
           <p:cNvSpPr txBox="1"/>
           <p:nvPr/>
         </p:nvSpPr>
@@ -4755,7 +4707,7 @@
       </p:sp>
       <p:sp>
         <p:nvSpPr>
-          <p:cNvPr id="7" name="TextBox 6"/>
+          <p:cNvPr id="6" name="TextBox 5"/>
           <p:cNvSpPr txBox="1"/>
           <p:nvPr/>
         </p:nvSpPr>
@@ -4791,7 +4743,7 @@
       </p:sp>
       <p:sp>
         <p:nvSpPr>
-          <p:cNvPr id="8" name="Rectangle 7"/>
+          <p:cNvPr id="7" name="Rectangle 6"/>
           <p:cNvSpPr/>
           <p:nvPr/>
         </p:nvSpPr>
@@ -4834,7 +4786,7 @@
       </p:sp>
       <p:sp>
         <p:nvSpPr>
-          <p:cNvPr id="9" name="Rounded Rectangle 8"/>
+          <p:cNvPr id="8" name="Rounded Rectangle 7"/>
           <p:cNvSpPr/>
           <p:nvPr/>
         </p:nvSpPr>
@@ -4892,7 +4844,7 @@
       </p:sp>
       <p:sp>
         <p:nvSpPr>
-          <p:cNvPr id="10" name="Rounded Rectangle 9"/>
+          <p:cNvPr id="9" name="Rounded Rectangle 8"/>
           <p:cNvSpPr/>
           <p:nvPr/>
         </p:nvSpPr>
@@ -4960,7 +4912,7 @@
       </p:sp>
       <p:sp>
         <p:nvSpPr>
-          <p:cNvPr id="11" name="Rounded Rectangle 10"/>
+          <p:cNvPr id="10" name="Rounded Rectangle 9"/>
           <p:cNvSpPr/>
           <p:nvPr/>
         </p:nvSpPr>
@@ -5028,7 +4980,7 @@
       </p:sp>
       <p:sp>
         <p:nvSpPr>
-          <p:cNvPr id="12" name="Rounded Rectangle 11"/>
+          <p:cNvPr id="11" name="Rounded Rectangle 10"/>
           <p:cNvSpPr/>
           <p:nvPr/>
         </p:nvSpPr>
@@ -5096,7 +5048,7 @@
       </p:sp>
       <p:sp>
         <p:nvSpPr>
-          <p:cNvPr id="13" name="Rounded Rectangle 12"/>
+          <p:cNvPr id="12" name="Rounded Rectangle 11"/>
           <p:cNvSpPr/>
           <p:nvPr/>
         </p:nvSpPr>
@@ -5164,7 +5116,7 @@
       </p:sp>
       <p:sp>
         <p:nvSpPr>
-          <p:cNvPr id="14" name="Rounded Rectangle 13"/>
+          <p:cNvPr id="13" name="Rounded Rectangle 12"/>
           <p:cNvSpPr/>
           <p:nvPr/>
         </p:nvSpPr>
@@ -5232,7 +5184,7 @@
       </p:sp>
       <p:sp>
         <p:nvSpPr>
-          <p:cNvPr id="15" name="Rounded Rectangle 14"/>
+          <p:cNvPr id="14" name="Rounded Rectangle 13"/>
           <p:cNvSpPr/>
           <p:nvPr/>
         </p:nvSpPr>
@@ -5300,7 +5252,7 @@
       </p:sp>
       <p:sp>
         <p:nvSpPr>
-          <p:cNvPr id="16" name="Rounded Rectangle 15"/>
+          <p:cNvPr id="15" name="Rounded Rectangle 14"/>
           <p:cNvSpPr/>
           <p:nvPr/>
         </p:nvSpPr>
@@ -5486,7 +5438,7 @@
       </p:sp>
       <p:sp>
         <p:nvSpPr>
-          <p:cNvPr id="17" name="Rounded Rectangle 16"/>
+          <p:cNvPr id="16" name="Rounded Rectangle 15"/>
           <p:cNvSpPr/>
           <p:nvPr/>
         </p:nvSpPr>
@@ -5553,7 +5505,7 @@
               </a:defRPr>
             </a:pPr>
             <a:r>
-              <a:t>❌ لسنا روبوت محادثة (Not a Chatbot):</a:t>
+              <a:t>لسنا روبوت محادثة (Not a Chatbot):</a:t>
             </a:r>
           </a:p>
           <a:p>
@@ -5585,7 +5537,7 @@
               </a:defRPr>
             </a:pPr>
             <a:r>
-              <a:t>❌ لسنا معالجاً بديلاً (Not a Therapist):</a:t>
+              <a:t>لسنا معالجاً بديلاً (Not a Therapist):</a:t>
             </a:r>
           </a:p>
           <a:p>
@@ -5617,7 +5569,7 @@
               </a:defRPr>
             </a:pPr>
             <a:r>
-              <a:t>✅ هدفنا الخروج السريع (Rapid Exit):</a:t>
+              <a:t>هدفنا الخروج السريع (Rapid Exit):</a:t>
             </a:r>
           </a:p>
           <a:p>
@@ -5649,7 +5601,7 @@
               </a:defRPr>
             </a:pPr>
             <a:r>
-              <a:t>👤 المستخدم هو المؤلف والمتحكم دائماً:</a:t>
+              <a:t>المستخدم هو المؤلف والمتحكم دائماً:</a:t>
             </a:r>
           </a:p>
           <a:p>
@@ -5672,7 +5624,7 @@
       </p:sp>
       <p:sp>
         <p:nvSpPr>
-          <p:cNvPr id="18" name="TextBox 17"/>
+          <p:cNvPr id="17" name="TextBox 16"/>
           <p:cNvSpPr txBox="1"/>
           <p:nvPr/>
         </p:nvSpPr>
@@ -5767,39 +5719,15 @@
           </a:p>
         </p:txBody>
       </p:sp>
-      <p:pic>
-        <p:nvPicPr>
-          <p:cNvPr id="3" name="Picture 2" descr="icon.png"/>
-          <p:cNvPicPr>
-            <a:picLocks noChangeAspect="1"/>
-          </p:cNvPicPr>
-          <p:nvPr/>
-        </p:nvPicPr>
-        <p:blipFill>
-          <a:blip r:embed="rId2"/>
-          <a:stretch>
-            <a:fillRect/>
-          </a:stretch>
-        </p:blipFill>
-        <p:spPr>
-          <a:xfrm>
-            <a:off x="548640" y="292608"/>
-            <a:ext cx="384048" cy="384048"/>
-          </a:xfrm>
-          <a:prstGeom prst="rect">
-            <a:avLst/>
-          </a:prstGeom>
-        </p:spPr>
-      </p:pic>
-      <p:sp>
-        <p:nvSpPr>
-          <p:cNvPr id="4" name="TextBox 3"/>
+      <p:sp>
+        <p:nvSpPr>
+          <p:cNvPr id="3" name="TextBox 2"/>
           <p:cNvSpPr txBox="1"/>
           <p:nvPr/>
         </p:nvSpPr>
         <p:spPr>
           <a:xfrm>
-            <a:off x="1024128" y="347472"/>
+            <a:off x="548640" y="347472"/>
             <a:ext cx="5486400" cy="320040"/>
           </a:xfrm>
           <a:prstGeom prst="rect">
@@ -5829,7 +5757,7 @@
       </p:sp>
       <p:sp>
         <p:nvSpPr>
-          <p:cNvPr id="5" name="Rounded Rectangle 4"/>
+          <p:cNvPr id="4" name="Rounded Rectangle 3"/>
           <p:cNvSpPr/>
           <p:nvPr/>
         </p:nvSpPr>
@@ -5884,7 +5812,7 @@
       </p:sp>
       <p:sp>
         <p:nvSpPr>
-          <p:cNvPr id="6" name="TextBox 5"/>
+          <p:cNvPr id="5" name="TextBox 4"/>
           <p:cNvSpPr txBox="1"/>
           <p:nvPr/>
         </p:nvSpPr>
@@ -5920,7 +5848,7 @@
       </p:sp>
       <p:sp>
         <p:nvSpPr>
-          <p:cNvPr id="7" name="TextBox 6"/>
+          <p:cNvPr id="6" name="TextBox 5"/>
           <p:cNvSpPr txBox="1"/>
           <p:nvPr/>
         </p:nvSpPr>
@@ -5956,7 +5884,7 @@
       </p:sp>
       <p:sp>
         <p:nvSpPr>
-          <p:cNvPr id="8" name="Rectangle 7"/>
+          <p:cNvPr id="7" name="Rectangle 6"/>
           <p:cNvSpPr/>
           <p:nvPr/>
         </p:nvSpPr>
@@ -5999,7 +5927,7 @@
       </p:sp>
       <p:sp>
         <p:nvSpPr>
-          <p:cNvPr id="9" name="Rounded Rectangle 8"/>
+          <p:cNvPr id="8" name="Rounded Rectangle 7"/>
           <p:cNvSpPr/>
           <p:nvPr/>
         </p:nvSpPr>
@@ -6185,7 +6113,7 @@
       </p:sp>
       <p:sp>
         <p:nvSpPr>
-          <p:cNvPr id="10" name="Rounded Rectangle 9"/>
+          <p:cNvPr id="9" name="Rounded Rectangle 8"/>
           <p:cNvSpPr/>
           <p:nvPr/>
         </p:nvSpPr>
@@ -6243,7 +6171,7 @@
       </p:sp>
       <p:sp>
         <p:nvSpPr>
-          <p:cNvPr id="11" name="TextBox 10"/>
+          <p:cNvPr id="10" name="TextBox 9"/>
           <p:cNvSpPr txBox="1"/>
           <p:nvPr/>
         </p:nvSpPr>
@@ -6279,7 +6207,7 @@
       </p:sp>
       <p:sp>
         <p:nvSpPr>
-          <p:cNvPr id="12" name="Rounded Rectangle 11"/>
+          <p:cNvPr id="11" name="Rounded Rectangle 10"/>
           <p:cNvSpPr/>
           <p:nvPr/>
         </p:nvSpPr>
@@ -6327,7 +6255,7 @@
               </a:defRPr>
             </a:pPr>
             <a:r>
-              <a:t>✨ صياغة الذكاء الاصطناعي (جسر — نبرة لطيفة للأم):</a:t>
+              <a:t>صياغة الذكاء الاصطناعي (جسر — نبرة لطيفة للأم):</a:t>
             </a:r>
           </a:p>
           <a:p>
@@ -6350,7 +6278,7 @@
       </p:sp>
       <p:sp>
         <p:nvSpPr>
-          <p:cNvPr id="13" name="Rounded Rectangle 12"/>
+          <p:cNvPr id="12" name="Rounded Rectangle 11"/>
           <p:cNvSpPr/>
           <p:nvPr/>
         </p:nvSpPr>
@@ -6398,7 +6326,7 @@
               </a:defRPr>
             </a:pPr>
             <a:r>
-              <a:t>📄 القالب الثابت التقليدي (Static Baseline Template):</a:t>
+              <a:t>القالب الثابت التقليدي (Static Baseline Template):</a:t>
             </a:r>
           </a:p>
           <a:p>
@@ -6421,7 +6349,7 @@
       </p:sp>
       <p:sp>
         <p:nvSpPr>
-          <p:cNvPr id="14" name="Rounded Rectangle 13"/>
+          <p:cNvPr id="13" name="Rounded Rectangle 12"/>
           <p:cNvSpPr/>
           <p:nvPr/>
         </p:nvSpPr>
@@ -6469,7 +6397,7 @@
               </a:defRPr>
             </a:pPr>
             <a:r>
-              <a:t>💡 الفارق العملي المقاس في التقييم:</a:t>
+              <a:t>الفارق العملي المقاس في التقييم:</a:t>
             </a:r>
           </a:p>
           <a:p>
@@ -6492,7 +6420,7 @@
       </p:sp>
       <p:sp>
         <p:nvSpPr>
-          <p:cNvPr id="15" name="TextBox 14"/>
+          <p:cNvPr id="14" name="TextBox 13"/>
           <p:cNvSpPr txBox="1"/>
           <p:nvPr/>
         </p:nvSpPr>
@@ -6587,39 +6515,15 @@
           </a:p>
         </p:txBody>
       </p:sp>
-      <p:pic>
-        <p:nvPicPr>
-          <p:cNvPr id="3" name="Picture 2" descr="icon.png"/>
-          <p:cNvPicPr>
-            <a:picLocks noChangeAspect="1"/>
-          </p:cNvPicPr>
-          <p:nvPr/>
-        </p:nvPicPr>
-        <p:blipFill>
-          <a:blip r:embed="rId2"/>
-          <a:stretch>
-            <a:fillRect/>
-          </a:stretch>
-        </p:blipFill>
-        <p:spPr>
-          <a:xfrm>
-            <a:off x="548640" y="292608"/>
-            <a:ext cx="384048" cy="384048"/>
-          </a:xfrm>
-          <a:prstGeom prst="rect">
-            <a:avLst/>
-          </a:prstGeom>
-        </p:spPr>
-      </p:pic>
-      <p:sp>
-        <p:nvSpPr>
-          <p:cNvPr id="4" name="TextBox 3"/>
+      <p:sp>
+        <p:nvSpPr>
+          <p:cNvPr id="3" name="TextBox 2"/>
           <p:cNvSpPr txBox="1"/>
           <p:nvPr/>
         </p:nvSpPr>
         <p:spPr>
           <a:xfrm>
-            <a:off x="1024128" y="347472"/>
+            <a:off x="548640" y="347472"/>
             <a:ext cx="5486400" cy="320040"/>
           </a:xfrm>
           <a:prstGeom prst="rect">
@@ -6649,7 +6553,7 @@
       </p:sp>
       <p:sp>
         <p:nvSpPr>
-          <p:cNvPr id="5" name="Rounded Rectangle 4"/>
+          <p:cNvPr id="4" name="Rounded Rectangle 3"/>
           <p:cNvSpPr/>
           <p:nvPr/>
         </p:nvSpPr>
@@ -6704,7 +6608,7 @@
       </p:sp>
       <p:sp>
         <p:nvSpPr>
-          <p:cNvPr id="6" name="TextBox 5"/>
+          <p:cNvPr id="5" name="TextBox 4"/>
           <p:cNvSpPr txBox="1"/>
           <p:nvPr/>
         </p:nvSpPr>
@@ -6740,7 +6644,7 @@
       </p:sp>
       <p:sp>
         <p:nvSpPr>
-          <p:cNvPr id="7" name="TextBox 6"/>
+          <p:cNvPr id="6" name="TextBox 5"/>
           <p:cNvSpPr txBox="1"/>
           <p:nvPr/>
         </p:nvSpPr>
@@ -6776,7 +6680,7 @@
       </p:sp>
       <p:sp>
         <p:nvSpPr>
-          <p:cNvPr id="8" name="Rectangle 7"/>
+          <p:cNvPr id="7" name="Rectangle 6"/>
           <p:cNvSpPr/>
           <p:nvPr/>
         </p:nvSpPr>
@@ -6819,7 +6723,7 @@
       </p:sp>
       <p:sp>
         <p:nvSpPr>
-          <p:cNvPr id="9" name="Rounded Rectangle 8"/>
+          <p:cNvPr id="8" name="Rounded Rectangle 7"/>
           <p:cNvSpPr/>
           <p:nvPr/>
         </p:nvSpPr>
@@ -6982,7 +6886,7 @@
               </a:defRPr>
             </a:pPr>
             <a:r>
-              <a:t>• 🆘 طريق بشري دائم (Persistent Human Route)</a:t>
+              <a:t>• طريق بشري دائم (Persistent Human Route)</a:t>
             </a:r>
           </a:p>
           <a:p>
@@ -7005,7 +6909,7 @@
       </p:sp>
       <p:sp>
         <p:nvSpPr>
-          <p:cNvPr id="10" name="Rounded Rectangle 9"/>
+          <p:cNvPr id="9" name="Rounded Rectangle 8"/>
           <p:cNvSpPr/>
           <p:nvPr/>
         </p:nvSpPr>
@@ -7063,7 +6967,7 @@
       </p:sp>
       <p:sp>
         <p:nvSpPr>
-          <p:cNvPr id="11" name="Rounded Rectangle 10"/>
+          <p:cNvPr id="10" name="Rounded Rectangle 9"/>
           <p:cNvSpPr/>
           <p:nvPr/>
         </p:nvSpPr>
@@ -7111,7 +7015,7 @@
               </a:defRPr>
             </a:pPr>
             <a:r>
-              <a:t>🎯 نتائج القياس على معيار الأزمات التخليقي (N=25 — Dev Set):</a:t>
+              <a:t>نتائج القياس على مجموعة اختبار منفصلة (N=64، لم تُستخدم في الضبط):</a:t>
             </a:r>
           </a:p>
           <a:p>
@@ -7127,7 +7031,7 @@
               </a:defRPr>
             </a:pPr>
             <a:r>
-              <a:t>• نسبة التقاط الأزمات (Crisis Recall): 90.9% (10 من 11 حالة على مجموعة التطوير — مجال ويلسون 62.3% – 98.4%)</a:t>
+              <a:t>• نسبة التقاط الأزمات (Crisis Recall): 26 من 26 على 64 جملة لم تُستخدم في الضبط (العبارات + النموذج، مجال ويلسون 87% – 100%)</a:t>
             </a:r>
           </a:p>
           <a:p>
@@ -7143,7 +7047,7 @@
               </a:defRPr>
             </a:pPr>
             <a:r>
-              <a:t>• معدل الإنذار الخاطئ (False-Alarm): 0.0% (0/11 حالات ضغط آمنة تم تمريرها)</a:t>
+              <a:t>• معدل الإنذار الخاطئ (False-Alarm): 3 من 30 (10%)؛ قائمة العبارات وحدها التقطت 6 من 26</a:t>
             </a:r>
           </a:p>
           <a:p>
@@ -7182,7 +7086,7 @@
       </p:sp>
       <p:sp>
         <p:nvSpPr>
-          <p:cNvPr id="12" name="Rounded Rectangle 11"/>
+          <p:cNvPr id="11" name="Rounded Rectangle 10"/>
           <p:cNvSpPr/>
           <p:nvPr/>
         </p:nvSpPr>
@@ -7230,7 +7134,7 @@
               </a:defRPr>
             </a:pPr>
             <a:r>
-              <a:t>🔒 الخصوصية الصفرية وحماية الهوية (Zero-Data-Retention):</a:t>
+              <a:t>الخصوصية الصفرية وحماية الهوية (Zero-Data-Retention):</a:t>
             </a:r>
           </a:p>
           <a:p>
@@ -7285,7 +7189,7 @@
       </p:sp>
       <p:sp>
         <p:nvSpPr>
-          <p:cNvPr id="13" name="TextBox 12"/>
+          <p:cNvPr id="12" name="TextBox 11"/>
           <p:cNvSpPr txBox="1"/>
           <p:nvPr/>
         </p:nvSpPr>
@@ -7380,39 +7284,15 @@
           </a:p>
         </p:txBody>
       </p:sp>
-      <p:pic>
-        <p:nvPicPr>
-          <p:cNvPr id="3" name="Picture 2" descr="icon.png"/>
-          <p:cNvPicPr>
-            <a:picLocks noChangeAspect="1"/>
-          </p:cNvPicPr>
-          <p:nvPr/>
-        </p:nvPicPr>
-        <p:blipFill>
-          <a:blip r:embed="rId2"/>
-          <a:stretch>
-            <a:fillRect/>
-          </a:stretch>
-        </p:blipFill>
-        <p:spPr>
-          <a:xfrm>
-            <a:off x="548640" y="292608"/>
-            <a:ext cx="384048" cy="384048"/>
-          </a:xfrm>
-          <a:prstGeom prst="rect">
-            <a:avLst/>
-          </a:prstGeom>
-        </p:spPr>
-      </p:pic>
-      <p:sp>
-        <p:nvSpPr>
-          <p:cNvPr id="4" name="TextBox 3"/>
+      <p:sp>
+        <p:nvSpPr>
+          <p:cNvPr id="3" name="TextBox 2"/>
           <p:cNvSpPr txBox="1"/>
           <p:nvPr/>
         </p:nvSpPr>
         <p:spPr>
           <a:xfrm>
-            <a:off x="1024128" y="347472"/>
+            <a:off x="548640" y="347472"/>
             <a:ext cx="5486400" cy="320040"/>
           </a:xfrm>
           <a:prstGeom prst="rect">
@@ -7442,7 +7322,7 @@
       </p:sp>
       <p:sp>
         <p:nvSpPr>
-          <p:cNvPr id="5" name="Rounded Rectangle 4"/>
+          <p:cNvPr id="4" name="Rounded Rectangle 3"/>
           <p:cNvSpPr/>
           <p:nvPr/>
         </p:nvSpPr>
@@ -7497,7 +7377,7 @@
       </p:sp>
       <p:sp>
         <p:nvSpPr>
-          <p:cNvPr id="6" name="TextBox 5"/>
+          <p:cNvPr id="5" name="TextBox 4"/>
           <p:cNvSpPr txBox="1"/>
           <p:nvPr/>
         </p:nvSpPr>
@@ -7533,7 +7413,7 @@
       </p:sp>
       <p:sp>
         <p:nvSpPr>
-          <p:cNvPr id="7" name="TextBox 6"/>
+          <p:cNvPr id="6" name="TextBox 5"/>
           <p:cNvSpPr txBox="1"/>
           <p:nvPr/>
         </p:nvSpPr>
@@ -7569,7 +7449,7 @@
       </p:sp>
       <p:sp>
         <p:nvSpPr>
-          <p:cNvPr id="8" name="Rectangle 7"/>
+          <p:cNvPr id="7" name="Rectangle 6"/>
           <p:cNvSpPr/>
           <p:nvPr/>
         </p:nvSpPr>
@@ -7612,7 +7492,7 @@
       </p:sp>
       <p:sp>
         <p:nvSpPr>
-          <p:cNvPr id="9" name="Rounded Rectangle 8"/>
+          <p:cNvPr id="8" name="Rounded Rectangle 7"/>
           <p:cNvSpPr/>
           <p:nvPr/>
         </p:nvSpPr>
@@ -7679,7 +7559,7 @@
               </a:defRPr>
             </a:pPr>
             <a:r>
-              <a:t>📦 حزمة Android APK مستقلة (builds/jisr-v1.0.0.apk):</a:t>
+              <a:t>حزمة Android APK مستقلة (builds/jisr-v1.0.0.apk):</a:t>
             </a:r>
           </a:p>
           <a:p>
@@ -7711,7 +7591,7 @@
               </a:defRPr>
             </a:pPr>
             <a:r>
-              <a:t>⚡ صمود تام أمام انقطاع الإنترنت والكهرباء:</a:t>
+              <a:t>صمود تام أمام انقطاع الإنترنت والكهرباء:</a:t>
             </a:r>
           </a:p>
           <a:p>
@@ -7743,7 +7623,7 @@
               </a:defRPr>
             </a:pPr>
             <a:r>
-              <a:t>🇱🇾 اللهجة الليبية البيضاء والثقافة الأسرية:</a:t>
+              <a:t>اللهجة الليبية البيضاء والثقافة الأسرية:</a:t>
             </a:r>
           </a:p>
           <a:p>
@@ -7775,7 +7655,7 @@
               </a:defRPr>
             </a:pPr>
             <a:r>
-              <a:t>💬 التصدير المباشر لواتساب وماسنجر:</a:t>
+              <a:t>التصدير المباشر لواتساب وماسنجر:</a:t>
             </a:r>
           </a:p>
           <a:p>
@@ -7796,33 +7676,9 @@
           </a:p>
         </p:txBody>
       </p:sp>
-      <p:pic>
-        <p:nvPicPr>
-          <p:cNvPr id="10" name="Picture 9" descr="icon.png"/>
-          <p:cNvPicPr>
-            <a:picLocks noChangeAspect="1"/>
-          </p:cNvPicPr>
-          <p:nvPr/>
-        </p:nvPicPr>
-        <p:blipFill>
-          <a:blip r:embed="rId2"/>
-          <a:stretch>
-            <a:fillRect/>
-          </a:stretch>
-        </p:blipFill>
-        <p:spPr>
-          <a:xfrm>
-            <a:off x="6400800" y="1993392"/>
-            <a:ext cx="594360" cy="594360"/>
-          </a:xfrm>
-          <a:prstGeom prst="rect">
-            <a:avLst/>
-          </a:prstGeom>
-        </p:spPr>
-      </p:pic>
-      <p:sp>
-        <p:nvSpPr>
-          <p:cNvPr id="11" name="Rounded Rectangle 10"/>
+      <p:sp>
+        <p:nvSpPr>
+          <p:cNvPr id="9" name="Rounded Rectangle 8"/>
           <p:cNvSpPr/>
           <p:nvPr/>
         </p:nvSpPr>
@@ -7889,7 +7745,7 @@
               </a:defRPr>
             </a:pPr>
             <a:r>
-              <a:t>• 👑 محمد ثابت (Mohamed Thabet) — قائد الفريق (Team Leader):</a:t>
+              <a:t>• محمد ثابت (Mohamed Thabet) — قائد الفريق (Team Leader):</a:t>
             </a:r>
           </a:p>
           <a:p>
@@ -7921,7 +7777,7 @@
               </a:defRPr>
             </a:pPr>
             <a:r>
-              <a:t>• 📱 ريان (Rayan) — مهندس الواجهات وتطبيق المحمول (Mobile Lead):</a:t>
+              <a:t>• ريان (Rayan) — مهندس الواجهات وتطبيق المحمول (Mobile Lead):</a:t>
             </a:r>
           </a:p>
           <a:p>
@@ -7953,7 +7809,7 @@
               </a:defRPr>
             </a:pPr>
             <a:r>
-              <a:t>• ⚙️ معتز (Muatz) — مهندس الذكاء الاصطناعي والخلفية (AI &amp; Backend):</a:t>
+              <a:t>• معتز (Muatz) — مهندس الذكاء الاصطناعي والخلفية (AI &amp; Backend):</a:t>
             </a:r>
           </a:p>
           <a:p>
@@ -7985,7 +7841,7 @@
               </a:defRPr>
             </a:pPr>
             <a:r>
-              <a:t>• 🛡️ شيماء (Shima) — مهندسة الأمان وطبقة الحارس (Safety Engineer):</a:t>
+              <a:t>• شيماء (Shima) — مهندسة الأمان وطبقة الحارس (Safety Engineer):</a:t>
             </a:r>
           </a:p>
           <a:p>
@@ -8008,7 +7864,7 @@
       </p:sp>
       <p:sp>
         <p:nvSpPr>
-          <p:cNvPr id="12" name="TextBox 11"/>
+          <p:cNvPr id="10" name="TextBox 9"/>
           <p:cNvSpPr txBox="1"/>
           <p:nvPr/>
         </p:nvSpPr>
